--- a/Workplace_Diversity_Analysis_Deck.pptx
+++ b/Workplace_Diversity_Analysis_Deck.pptx
@@ -1610,7 +1610,7 @@
                 </a:solidFill>
                 <a:latin typeface="Calibri"/>
               </a:rPr>
-              <a:t>Average years of experience to reach each level</a:t>
+              <a:t>Average years of experience at each level</a:t>
             </a:r>
           </a:p>
         </c:rich>
@@ -3996,7 +3996,7 @@
                 <a:ea typeface="Calibri" pitchFamily="34" charset="-122"/>
                 <a:cs typeface="Calibri" pitchFamily="34" charset="-120"/>
               </a:rPr>
-              <a:t>The comp model looks fair — but that finding can mask a structural issue: who gets into which department, and who gets promoted.</a:t>
+              <a:t>The model finds no significant gap within level and department — not proof of fairness (no performance control). It can mask who gets into which department and who gets promoted.</a:t>
             </a:r>
             <a:endParaRPr lang="en-US" sz="1250" dirty="0"/>
           </a:p>
@@ -4654,7 +4654,7 @@
                 <a:ea typeface="Cambria" pitchFamily="34" charset="-122"/>
                 <a:cs typeface="Cambria" pitchFamily="34" charset="-120"/>
               </a:rPr>
-              <a:t>Pay is fair for equal roles. Representation and promotion speed are where the company should focus next.</a:t>
+              <a:t>No significant pay gap within level and department. Representation and promotion speed are where to look next.</a:t>
             </a:r>
             <a:endParaRPr lang="en-US" sz="2800" dirty="0"/>
           </a:p>
@@ -4803,7 +4803,7 @@
                 <a:ea typeface="Calibri" pitchFamily="34" charset="-122"/>
                 <a:cs typeface="Calibri" pitchFamily="34" charset="-120"/>
               </a:rPr>
-              <a:t>There is a real 14% pay gap between men and women. But it isn't a same-job pay problem — it's a representation and promotion problem that shows up downstream as a pay gap.</a:t>
+              <a:t>There is a real 14% pay gap between men and women. We find no significant gap within the same level and department — the pattern points to representation and promotion differences that show up downstream as a pay gap.</a:t>
             </a:r>
             <a:endParaRPr lang="en-US" sz="1600" dirty="0"/>
           </a:p>
@@ -5135,7 +5135,7 @@
                 <a:ea typeface="Calibri" pitchFamily="34" charset="-122"/>
                 <a:cs typeface="Calibri" pitchFamily="34" charset="-120"/>
               </a:rPr>
-              <a:t>Not significant, p = 0.65 — pay is fair for equal roles</a:t>
+              <a:t>Not significant, p = 0.65 — no significant gap within the same level and department (no performance control)</a:t>
             </a:r>
             <a:endParaRPr lang="en-US" sz="1150" dirty="0"/>
           </a:p>
@@ -5262,7 +5262,7 @@
                 <a:ea typeface="Calibri" pitchFamily="34" charset="-122"/>
                 <a:cs typeface="Calibri" pitchFamily="34" charset="-120"/>
               </a:rPr>
-              <a:t>Women vs. men in Engineering</a:t>
+              <a:t>Share of women vs. men working in Engineering</a:t>
             </a:r>
             <a:endParaRPr lang="en-US" sz="1400" dirty="0"/>
           </a:p>
@@ -5783,7 +5783,7 @@
                 <a:ea typeface="Calibri" pitchFamily="34" charset="-122"/>
                 <a:cs typeface="Calibri" pitchFamily="34" charset="-120"/>
               </a:rPr>
-              <a:t>Implemented directly in numpy (no internet access for scikit-learn/statsmodels in this environment); significance from the normal approximation, accurate at n ≈ 10,000.</a:t>
+              <a:t>OLS implemented directly in NumPy; significance from the normal approximation, accurate at n ≈ 10,000.</a:t>
             </a:r>
             <a:endParaRPr lang="en-US" sz="1200" dirty="0"/>
           </a:p>
@@ -5920,7 +5920,7 @@
                 <a:ea typeface="Calibri" pitchFamily="34" charset="-122"/>
                 <a:cs typeface="Calibri" pitchFamily="34" charset="-120"/>
               </a:rPr>
-              <a:t>Compared raw pay gaps to gaps after controlling for level, department, degree, experience, and tenure.</a:t>
+              <a:t>Compared raw pay gaps to gaps after controlling for level, department, degree, experience, and signing bonus.</a:t>
             </a:r>
             <a:endParaRPr lang="en-US" sz="1200" dirty="0"/>
           </a:p>
@@ -6030,7 +6030,7 @@
                 <a:ea typeface="Calibri" pitchFamily="34" charset="-122"/>
                 <a:cs typeface="Calibri" pitchFamily="34" charset="-120"/>
               </a:rPr>
-              <a:t>Share of the 10,000-person company at each level</a:t>
+              <a:t>Share of the 10,000-person company at each level (bar not to scale)</a:t>
             </a:r>
             <a:endParaRPr lang="en-US" sz="1400" dirty="0"/>
           </a:p>
@@ -8590,7 +8590,7 @@
                 <a:ea typeface="Calibri" pitchFamily="34" charset="-122"/>
                 <a:cs typeface="Calibri" pitchFamily="34" charset="-120"/>
               </a:rPr>
-              <a:t>Level and department dominate; tenure, degree, and signing bonus barely matter</a:t>
+              <a:t>Level and department dominate; experience, degree, and signing bonus show no significant effect</a:t>
             </a:r>
             <a:endParaRPr lang="en-US" sz="1400" dirty="0"/>
           </a:p>
@@ -9105,7 +9105,7 @@
                 <a:ea typeface="Calibri" pitchFamily="34" charset="-122"/>
                 <a:cs typeface="Calibri" pitchFamily="34" charset="-120"/>
               </a:rPr>
-              <a:t>Degree, tenure, signing bonus, and sex — all p ≥ 0.13. Sex in particular: p = 0.65.</a:t>
+              <a:t>Degree, experience, signing bonus, and sex — all p ≥ 0.13. Sex in particular: p = 0.65.</a:t>
             </a:r>
             <a:endParaRPr lang="en-US" sz="1100" dirty="0"/>
           </a:p>
@@ -9167,7 +9167,7 @@
                 <a:ea typeface="Calibri" pitchFamily="34" charset="-122"/>
                 <a:cs typeface="Calibri" pitchFamily="34" charset="-120"/>
               </a:rPr>
-              <a:t>Bottom line: level + department set pay. Once you're in a role, sex does not move the needle.</a:t>
+              <a:t>Bottom line: level and department set pay. With them held constant, sex has no significant effect.</a:t>
             </a:r>
             <a:endParaRPr lang="en-US" sz="1200" dirty="0"/>
           </a:p>
@@ -9603,7 +9603,7 @@
                 <a:ea typeface="Calibri" pitchFamily="34" charset="-122"/>
                 <a:cs typeface="Calibri" pitchFamily="34" charset="-120"/>
               </a:rPr>
-              <a:t>Women are concentrated in the lowest-paying department and scarce in the highest-paying one</a:t>
+              <a:t>A larger share of women than men work in the lowest-paying department, and a smaller share in the highest-paying one</a:t>
             </a:r>
             <a:endParaRPr lang="en-US" sz="1400" dirty="0"/>
           </a:p>
@@ -9719,7 +9719,7 @@
                 <a:ea typeface="Calibri" pitchFamily="34" charset="-122"/>
                 <a:cs typeface="Calibri" pitchFamily="34" charset="-120"/>
               </a:rPr>
-              <a:t>18.8% women  vs.  31.4% men</a:t>
+              <a:t>18.8% of women  vs.  31.4% of men</a:t>
             </a:r>
             <a:endParaRPr lang="en-US" sz="1300" dirty="0"/>
           </a:p>
@@ -9858,7 +9858,7 @@
                 <a:ea typeface="Calibri" pitchFamily="34" charset="-122"/>
                 <a:cs typeface="Calibri" pitchFamily="34" charset="-120"/>
               </a:rPr>
-              <a:t>29.7% women  vs.  9.9% men</a:t>
+              <a:t>29.7% of women  vs.  9.9% of men</a:t>
             </a:r>
             <a:endParaRPr lang="en-US" sz="1300" dirty="0"/>
           </a:p>
@@ -9968,7 +9968,7 @@
                 <a:ea typeface="Cambria" pitchFamily="34" charset="-122"/>
                 <a:cs typeface="Cambria" pitchFamily="34" charset="-120"/>
               </a:rPr>
-              <a:t>A Slower Path to the Top</a:t>
+              <a:t>Experience at Senior Levels</a:t>
             </a:r>
             <a:endParaRPr lang="en-US" sz="3000" dirty="0"/>
           </a:p>
@@ -10007,7 +10007,7 @@
                 <a:ea typeface="Calibri" pitchFamily="34" charset="-122"/>
                 <a:cs typeface="Calibri" pitchFamily="34" charset="-120"/>
               </a:rPr>
-              <a:t>Women who reach senior levels have needed more tenure to get there than men at the same level</a:t>
+              <a:t>Women at senior levels have more experience on average than men at the same level</a:t>
             </a:r>
             <a:endParaRPr lang="en-US" sz="1400" dirty="0"/>
           </a:p>
@@ -10162,7 +10162,7 @@
                 <a:ea typeface="Calibri" pitchFamily="34" charset="-122"/>
                 <a:cs typeface="Calibri" pitchFamily="34" charset="-120"/>
               </a:rPr>
-              <a:t>16.5 yrs (women)  vs.  12.9 yrs (men)</a:t>
+              <a:t>16.5 yrs (women)  vs.  12.9 yrs (men) (not significance-tested)</a:t>
             </a:r>
             <a:endParaRPr lang="en-US" sz="1300" dirty="0"/>
           </a:p>
@@ -10262,7 +10262,7 @@
                 <a:ea typeface="Calibri" pitchFamily="34" charset="-122"/>
                 <a:cs typeface="Calibri" pitchFamily="34" charset="-120"/>
               </a:rPr>
-              <a:t>25.6 yrs (women)  vs.  19.0 yrs (men)</a:t>
+              <a:t>25.6 yrs (women)  vs.  19.0 yrs (men) (not significance-tested)</a:t>
             </a:r>
             <a:endParaRPr lang="en-US" sz="1300" dirty="0"/>
           </a:p>
@@ -10301,7 +10301,7 @@
                 <a:ea typeface="Calibri" pitchFamily="34" charset="-122"/>
                 <a:cs typeface="Calibri" pitchFamily="34" charset="-120"/>
               </a:rPr>
-              <a:t>Women also hold only 1.60% of Director+ roles, vs. 2.21% for men (p = 0.038).</a:t>
+              <a:t>1.60% of women reach Director or above, vs. 2.21% of men (p = 0.038).</a:t>
             </a:r>
             <a:endParaRPr lang="en-US" sz="1150" dirty="0"/>
           </a:p>
